--- a/dist/초2/환경·생태/생활과환경/초2_환경·생태_생활과환경_01_학교와마을의환경.pptx
+++ b/dist/초2/환경·생태/생활과환경/초2_환경·생태_생활과환경_01_학교와마을의환경.pptx
@@ -115,41 +115,41 @@
   <p:extLst>
     <p:ext uri="{521415D9-36F7-43E2-AB2F-B90AF26B5E84}">
       <p14:sectionLst xmlns:p14="http://schemas.microsoft.com/office/powerpoint/2010/main">
-        <p14:section name="도입" id="{0fd5920b-9ea5-5d7b-5cab-c9afcda5656f}">
+        <p14:section name="도입" id="{507b3ce8-5142-120b-d3a2-4fc823f8ea2b}">
           <p14:sldIdLst>
             <p14:sldId id="256"/>
             <p14:sldId id="257"/>
           </p14:sldIdLst>
         </p14:section>
-        <p14:section name="개념" id="{a722f33f-8ba7-da5c-2c9e-4ac2a6f2d3ff}">
+        <p14:section name="개념" id="{01c6dc3f-3064-afb5-5861-d037c13bd021}">
           <p14:sldIdLst>
             <p14:sldId id="258"/>
             <p14:sldId id="260"/>
           </p14:sldIdLst>
         </p14:section>
-        <p14:section name="연습" id="{00dbee25-82ad-6146-acd5-358ad068b282}">
+        <p14:section name="연습" id="{a84e1101-f727-ba63-e93d-e66fbfdb06c4}">
           <p14:sldIdLst>
             <p14:sldId id="259"/>
             <p14:sldId id="261"/>
           </p14:sldIdLst>
         </p14:section>
-        <p14:section name="개념" id="{e5616408-fd04-04c6-16f2-132d6b8dae5f}">
+        <p14:section name="개념" id="{4cb460d4-fb2d-3423-4c9f-a1d9ba94be3d}">
           <p14:sldIdLst/>
         </p14:section>
-        <p14:section name="연습" id="{ea0ed179-4f64-025d-456a-c004f1f68e74}">
+        <p14:section name="연습" id="{75d157f6-afc9-af28-382a-700c57ce3399}">
           <p14:sldIdLst/>
         </p14:section>
-        <p14:section name="확인" id="{b169b379-c4b8-48c7-078a-a996b413214c}">
+        <p14:section name="확인" id="{1c560a26-fac1-102e-7891-4646ed3d61ad}">
           <p14:sldIdLst>
             <p14:sldId id="262"/>
           </p14:sldIdLst>
         </p14:section>
-        <p14:section name="정리" id="{e5923b22-bf1d-8dab-a8b8-a5be3b3c78bc}">
+        <p14:section name="정리" id="{08ce2390-1dba-8a89-1bf7-f4d0a6a6ab39}">
           <p14:sldIdLst>
             <p14:sldId id="263"/>
           </p14:sldIdLst>
         </p14:section>
-        <p14:section name="보충" id="{1aa9507e-4b38-27fc-3bfc-10408c5deaf9}">
+        <p14:section name="보충" id="{cb1e34a7-b98d-3fa9-73cb-bce236690f33}">
           <p14:sldIdLst>
             <p14:sldId id="264"/>
           </p14:sldIdLst>
@@ -3768,14 +3768,14 @@
       </p:sp>
       <p:sp>
         <p:nvSpPr>
-          <p:cNvPr id="6" name="S04-figure22" descr="지어낸 하늘 마을 지도. 위쪽에 나무 세 그루가 있는 공원, 학교, 공사장이 있고, 가운데로 횡단보도가 있는 큰길이 지나며, 아래쪽에 집, 놀이터, 쓰레기 쌓인 곳이 있다."/>
+          <p:cNvPr id="6" name="S04-figure22" descr="지어낸 하늘 마을 지도. 위쪽에 나무 네 그루가 있는 공원, 학교, 공사장이 있고, 가운데로 횡단보도가 있는 큰길이 지나며, 아래쪽에 집, 놀이터, 쓰레기 쌓인 곳이 있다."/>
           <p:cNvSpPr/>
           <p:nvPr/>
         </p:nvSpPr>
         <p:spPr>
           <a:xfrm>
-            <a:off x="6450199" y="2330289"/>
-            <a:ext cx="1623234" cy="959184"/>
+            <a:off x="6607771" y="2110740"/>
+            <a:ext cx="1418102" cy="1119554"/>
           </a:xfrm>
           <a:custGeom>
             <a:avLst/>
@@ -3784,15 +3784,15 @@
             <a:cxnLst/>
             <a:rect l="l" t="t" r="r" b="b"/>
             <a:pathLst>
-              <a:path w="1623234" h="959184">
+              <a:path w="1418102" h="1119554">
                 <a:moveTo>
-                  <a:pt x="0" y="959184"/>
+                  <a:pt x="0" y="1119554"/>
                 </a:moveTo>
                 <a:lnTo>
-                  <a:pt x="1623234" y="959184"/>
+                  <a:pt x="1418102" y="1119554"/>
                 </a:lnTo>
                 <a:lnTo>
-                  <a:pt x="1623234" y="0"/>
+                  <a:pt x="1418102" y="0"/>
                 </a:lnTo>
                 <a:lnTo>
                   <a:pt x="0" y="0"/>
@@ -3820,8 +3820,8 @@
         </p:nvSpPr>
         <p:spPr>
           <a:xfrm>
-            <a:off x="8294784" y="2330289"/>
-            <a:ext cx="1475667" cy="959184"/>
+            <a:off x="8249783" y="2110740"/>
+            <a:ext cx="1418102" cy="1119554"/>
           </a:xfrm>
           <a:custGeom>
             <a:avLst/>
@@ -3830,15 +3830,15 @@
             <a:cxnLst/>
             <a:rect l="l" t="t" r="r" b="b"/>
             <a:pathLst>
-              <a:path w="1475667" h="959184">
+              <a:path w="1418102" h="1119554">
                 <a:moveTo>
-                  <a:pt x="0" y="959184"/>
+                  <a:pt x="0" y="1119554"/>
                 </a:moveTo>
                 <a:lnTo>
-                  <a:pt x="1475667" y="959184"/>
+                  <a:pt x="1418102" y="1119554"/>
                 </a:lnTo>
                 <a:lnTo>
-                  <a:pt x="1475667" y="0"/>
+                  <a:pt x="1418102" y="0"/>
                 </a:lnTo>
                 <a:lnTo>
                   <a:pt x="0" y="0"/>
@@ -3866,8 +3866,8 @@
         </p:nvSpPr>
         <p:spPr>
           <a:xfrm>
-            <a:off x="9991801" y="2330289"/>
-            <a:ext cx="1475667" cy="959184"/>
+            <a:off x="9891796" y="2110740"/>
+            <a:ext cx="1418102" cy="1119554"/>
           </a:xfrm>
           <a:custGeom>
             <a:avLst/>
@@ -3876,15 +3876,15 @@
             <a:cxnLst/>
             <a:rect l="l" t="t" r="r" b="b"/>
             <a:pathLst>
-              <a:path w="1475667" h="959184">
+              <a:path w="1418102" h="1119554">
                 <a:moveTo>
-                  <a:pt x="0" y="959184"/>
+                  <a:pt x="0" y="1119554"/>
                 </a:moveTo>
                 <a:lnTo>
-                  <a:pt x="1475667" y="959184"/>
+                  <a:pt x="1418102" y="1119554"/>
                 </a:lnTo>
                 <a:lnTo>
-                  <a:pt x="1475667" y="0"/>
+                  <a:pt x="1418102" y="0"/>
                 </a:lnTo>
                 <a:lnTo>
                   <a:pt x="0" y="0"/>
@@ -3912,8 +3912,8 @@
         </p:nvSpPr>
         <p:spPr>
           <a:xfrm>
-            <a:off x="6376416" y="3473931"/>
-            <a:ext cx="5164836" cy="405809"/>
+            <a:off x="6533134" y="3379568"/>
+            <a:ext cx="4851400" cy="447822"/>
           </a:xfrm>
           <a:custGeom>
             <a:avLst/>
@@ -3922,15 +3922,15 @@
             <a:cxnLst/>
             <a:rect l="l" t="t" r="r" b="b"/>
             <a:pathLst>
-              <a:path w="5164836" h="405809">
+              <a:path w="4851400" h="447822">
                 <a:moveTo>
-                  <a:pt x="0" y="405809"/>
+                  <a:pt x="0" y="447822"/>
                 </a:moveTo>
                 <a:lnTo>
-                  <a:pt x="5164836" y="405809"/>
+                  <a:pt x="4851400" y="447822"/>
                 </a:lnTo>
                 <a:lnTo>
-                  <a:pt x="5164836" y="0"/>
+                  <a:pt x="4851400" y="0"/>
                 </a:lnTo>
                 <a:lnTo>
                   <a:pt x="0" y="0"/>
@@ -3953,8 +3953,8 @@
         </p:nvSpPr>
         <p:spPr>
           <a:xfrm>
-            <a:off x="8811267" y="3787510"/>
-            <a:ext cx="442700" cy="55338"/>
+            <a:off x="8734923" y="3726629"/>
+            <a:ext cx="447822" cy="55978"/>
           </a:xfrm>
           <a:custGeom>
             <a:avLst/>
@@ -3963,15 +3963,15 @@
             <a:cxnLst/>
             <a:rect l="l" t="t" r="r" b="b"/>
             <a:pathLst>
-              <a:path w="442700" h="55338">
+              <a:path w="447822" h="55978">
                 <a:moveTo>
-                  <a:pt x="0" y="55338"/>
+                  <a:pt x="0" y="55978"/>
                 </a:moveTo>
                 <a:lnTo>
-                  <a:pt x="442700" y="55338"/>
+                  <a:pt x="447822" y="55978"/>
                 </a:lnTo>
                 <a:lnTo>
-                  <a:pt x="442700" y="0"/>
+                  <a:pt x="447822" y="0"/>
                 </a:lnTo>
                 <a:lnTo>
                   <a:pt x="0" y="0"/>
@@ -3994,8 +3994,8 @@
         </p:nvSpPr>
         <p:spPr>
           <a:xfrm>
-            <a:off x="8811267" y="3676835"/>
-            <a:ext cx="442700" cy="55338"/>
+            <a:off x="8734923" y="3614674"/>
+            <a:ext cx="447822" cy="55978"/>
           </a:xfrm>
           <a:custGeom>
             <a:avLst/>
@@ -4004,15 +4004,15 @@
             <a:cxnLst/>
             <a:rect l="l" t="t" r="r" b="b"/>
             <a:pathLst>
-              <a:path w="442700" h="55338">
+              <a:path w="447822" h="55978">
                 <a:moveTo>
-                  <a:pt x="0" y="55338"/>
+                  <a:pt x="0" y="55978"/>
                 </a:moveTo>
                 <a:lnTo>
-                  <a:pt x="442700" y="55338"/>
+                  <a:pt x="447822" y="55978"/>
                 </a:lnTo>
                 <a:lnTo>
-                  <a:pt x="442700" y="0"/>
+                  <a:pt x="447822" y="0"/>
                 </a:lnTo>
                 <a:lnTo>
                   <a:pt x="0" y="0"/>
@@ -4035,8 +4035,8 @@
         </p:nvSpPr>
         <p:spPr>
           <a:xfrm>
-            <a:off x="8811267" y="3566160"/>
-            <a:ext cx="442700" cy="55338"/>
+            <a:off x="8734923" y="3502719"/>
+            <a:ext cx="447822" cy="55978"/>
           </a:xfrm>
           <a:custGeom>
             <a:avLst/>
@@ -4045,15 +4045,15 @@
             <a:cxnLst/>
             <a:rect l="l" t="t" r="r" b="b"/>
             <a:pathLst>
-              <a:path w="442700" h="55338">
+              <a:path w="447822" h="55978">
                 <a:moveTo>
-                  <a:pt x="0" y="55338"/>
+                  <a:pt x="0" y="55978"/>
                 </a:moveTo>
                 <a:lnTo>
-                  <a:pt x="442700" y="55338"/>
+                  <a:pt x="447822" y="55978"/>
                 </a:lnTo>
                 <a:lnTo>
-                  <a:pt x="442700" y="0"/>
+                  <a:pt x="447822" y="0"/>
                 </a:lnTo>
                 <a:lnTo>
                   <a:pt x="0" y="0"/>
@@ -4076,8 +4076,8 @@
         </p:nvSpPr>
         <p:spPr>
           <a:xfrm>
-            <a:off x="6597766" y="4027306"/>
-            <a:ext cx="1180534" cy="774725"/>
+            <a:off x="8734923" y="3390763"/>
+            <a:ext cx="447822" cy="55978"/>
           </a:xfrm>
           <a:custGeom>
             <a:avLst/>
@@ -4086,21 +4086,62 @@
             <a:cxnLst/>
             <a:rect l="l" t="t" r="r" b="b"/>
             <a:pathLst>
-              <a:path w="1180534" h="774725">
+              <a:path w="447822" h="55978">
                 <a:moveTo>
-                  <a:pt x="0" y="774725"/>
+                  <a:pt x="0" y="55978"/>
                 </a:moveTo>
                 <a:lnTo>
-                  <a:pt x="1180534" y="774725"/>
+                  <a:pt x="447822" y="55978"/>
                 </a:lnTo>
                 <a:lnTo>
-                  <a:pt x="1180534" y="295133"/>
+                  <a:pt x="447822" y="0"/>
                 </a:lnTo>
                 <a:lnTo>
-                  <a:pt x="590267" y="0"/>
+                  <a:pt x="0" y="0"/>
+                </a:lnTo>
+                <a:close/>
+              </a:path>
+            </a:pathLst>
+          </a:custGeom>
+          <a:solidFill>
+            <a:srgbClr val="FFFFFF"/>
+          </a:solidFill>
+          <a:ln/>
+        </p:spPr>
+      </p:sp>
+      <p:sp>
+        <p:nvSpPr>
+          <p:cNvPr id="14" name="S04-mark30"/>
+          <p:cNvSpPr/>
+          <p:nvPr/>
+        </p:nvSpPr>
+        <p:spPr>
+          <a:xfrm>
+            <a:off x="6757045" y="4051300"/>
+            <a:ext cx="1119554" cy="970280"/>
+          </a:xfrm>
+          <a:custGeom>
+            <a:avLst/>
+            <a:gdLst/>
+            <a:ahLst/>
+            <a:cxnLst/>
+            <a:rect l="l" t="t" r="r" b="b"/>
+            <a:pathLst>
+              <a:path w="1119554" h="970280">
+                <a:moveTo>
+                  <a:pt x="0" y="970280"/>
+                </a:moveTo>
+                <a:lnTo>
+                  <a:pt x="1119554" y="970280"/>
                 </a:lnTo>
                 <a:lnTo>
-                  <a:pt x="0" y="295133"/>
+                  <a:pt x="1119554" y="373185"/>
+                </a:lnTo>
+                <a:lnTo>
+                  <a:pt x="559777" y="0"/>
+                </a:lnTo>
+                <a:lnTo>
+                  <a:pt x="0" y="373185"/>
                 </a:lnTo>
                 <a:close/>
               </a:path>
@@ -4119,14 +4160,14 @@
       </p:sp>
       <p:sp>
         <p:nvSpPr>
-          <p:cNvPr id="14" name="S04-mark30"/>
+          <p:cNvPr id="15" name="S04-mark31"/>
           <p:cNvSpPr/>
           <p:nvPr/>
         </p:nvSpPr>
         <p:spPr>
           <a:xfrm>
-            <a:off x="8294784" y="4064198"/>
-            <a:ext cx="1475667" cy="737834"/>
+            <a:off x="8249783" y="3976663"/>
+            <a:ext cx="1418102" cy="1044917"/>
           </a:xfrm>
           <a:custGeom>
             <a:avLst/>
@@ -4135,15 +4176,15 @@
             <a:cxnLst/>
             <a:rect l="l" t="t" r="r" b="b"/>
             <a:pathLst>
-              <a:path w="1475667" h="737834">
+              <a:path w="1418102" h="1044917">
                 <a:moveTo>
-                  <a:pt x="0" y="737834"/>
+                  <a:pt x="0" y="1044917"/>
                 </a:moveTo>
                 <a:lnTo>
-                  <a:pt x="1475667" y="737834"/>
+                  <a:pt x="1418102" y="1044917"/>
                 </a:lnTo>
                 <a:lnTo>
-                  <a:pt x="1475667" y="0"/>
+                  <a:pt x="1418102" y="0"/>
                 </a:lnTo>
                 <a:lnTo>
                   <a:pt x="0" y="0"/>
@@ -4165,14 +4206,14 @@
       </p:sp>
       <p:sp>
         <p:nvSpPr>
-          <p:cNvPr id="15" name="S04-mark31"/>
+          <p:cNvPr id="16" name="S04-mark32"/>
           <p:cNvSpPr/>
           <p:nvPr/>
         </p:nvSpPr>
         <p:spPr>
           <a:xfrm>
-            <a:off x="9991801" y="4064198"/>
-            <a:ext cx="1475667" cy="737834"/>
+            <a:off x="9891796" y="3976663"/>
+            <a:ext cx="1418102" cy="1044917"/>
           </a:xfrm>
           <a:custGeom>
             <a:avLst/>
@@ -4181,15 +4222,15 @@
             <a:cxnLst/>
             <a:rect l="l" t="t" r="r" b="b"/>
             <a:pathLst>
-              <a:path w="1475667" h="737834">
+              <a:path w="1418102" h="1044917">
                 <a:moveTo>
-                  <a:pt x="0" y="737834"/>
+                  <a:pt x="0" y="1044917"/>
                 </a:moveTo>
                 <a:lnTo>
-                  <a:pt x="1475667" y="737834"/>
+                  <a:pt x="1418102" y="1044917"/>
                 </a:lnTo>
                 <a:lnTo>
-                  <a:pt x="1475667" y="0"/>
+                  <a:pt x="1418102" y="0"/>
                 </a:lnTo>
                 <a:lnTo>
                   <a:pt x="0" y="0"/>
@@ -4211,14 +4252,14 @@
       </p:sp>
       <p:sp>
         <p:nvSpPr>
-          <p:cNvPr id="16" name="S04-mark32"/>
+          <p:cNvPr id="17" name="S04-mark33"/>
           <p:cNvSpPr/>
           <p:nvPr/>
         </p:nvSpPr>
         <p:spPr>
           <a:xfrm>
-            <a:off x="6560874" y="2440964"/>
-            <a:ext cx="368917" cy="368917"/>
+            <a:off x="6682408" y="2222695"/>
+            <a:ext cx="373185" cy="373185"/>
           </a:xfrm>
           <a:prstGeom prst="ellipse">
             <a:avLst/>
@@ -4236,14 +4277,14 @@
       </p:sp>
       <p:sp>
         <p:nvSpPr>
-          <p:cNvPr id="17" name="S04-mark33"/>
+          <p:cNvPr id="18" name="S04-mark34"/>
           <p:cNvSpPr/>
           <p:nvPr/>
         </p:nvSpPr>
         <p:spPr>
           <a:xfrm>
-            <a:off x="6966683" y="2404072"/>
-            <a:ext cx="368917" cy="368917"/>
+            <a:off x="7092911" y="2185377"/>
+            <a:ext cx="373185" cy="373185"/>
           </a:xfrm>
           <a:prstGeom prst="ellipse">
             <a:avLst/>
@@ -4261,14 +4302,14 @@
       </p:sp>
       <p:sp>
         <p:nvSpPr>
-          <p:cNvPr id="18" name="S04-mark34"/>
+          <p:cNvPr id="19" name="S04-mark35"/>
           <p:cNvSpPr/>
           <p:nvPr/>
         </p:nvSpPr>
         <p:spPr>
           <a:xfrm>
-            <a:off x="6708441" y="2846772"/>
-            <a:ext cx="368917" cy="368917"/>
+            <a:off x="7503414" y="2222695"/>
+            <a:ext cx="373185" cy="373185"/>
           </a:xfrm>
           <a:prstGeom prst="ellipse">
             <a:avLst/>
@@ -4286,13 +4327,38 @@
       </p:sp>
       <p:sp>
         <p:nvSpPr>
-          <p:cNvPr id="19" name="S04-label36"/>
+          <p:cNvPr id="20" name="S04-mark36"/>
+          <p:cNvSpPr/>
+          <p:nvPr/>
+        </p:nvSpPr>
+        <p:spPr>
+          <a:xfrm>
+            <a:off x="6719726" y="2670517"/>
+            <a:ext cx="373185" cy="373185"/>
+          </a:xfrm>
+          <a:prstGeom prst="ellipse">
+            <a:avLst/>
+          </a:prstGeom>
+          <a:solidFill>
+            <a:srgbClr val="2A9D8F"/>
+          </a:solidFill>
+          <a:ln w="28575">
+            <a:solidFill>
+              <a:srgbClr val="1F2937"/>
+            </a:solidFill>
+            <a:prstDash val="solid"/>
+          </a:ln>
+        </p:spPr>
+      </p:sp>
+      <p:sp>
+        <p:nvSpPr>
+          <p:cNvPr id="21" name="S04-label38"/>
           <p:cNvSpPr txBox="1"/>
           <p:nvPr/>
         </p:nvSpPr>
         <p:spPr>
           <a:xfrm>
-            <a:off x="7289165" y="2603505"/>
+            <a:off x="7199591" y="2762690"/>
             <a:ext cx="756920" cy="412750"/>
           </a:xfrm>
           <a:prstGeom prst="rect">
@@ -4325,13 +4391,13 @@
       </p:sp>
       <p:sp>
         <p:nvSpPr>
-          <p:cNvPr id="20" name="S04-label38"/>
+          <p:cNvPr id="22" name="S04-label40"/>
           <p:cNvSpPr txBox="1"/>
           <p:nvPr/>
         </p:nvSpPr>
         <p:spPr>
           <a:xfrm>
-            <a:off x="8654157" y="2603505"/>
+            <a:off x="8580374" y="2464142"/>
             <a:ext cx="756920" cy="412750"/>
           </a:xfrm>
           <a:prstGeom prst="rect">
@@ -4364,13 +4430,13 @@
       </p:sp>
       <p:sp>
         <p:nvSpPr>
-          <p:cNvPr id="21" name="S04-label40"/>
+          <p:cNvPr id="23" name="S04-label42"/>
           <p:cNvSpPr txBox="1"/>
           <p:nvPr/>
         </p:nvSpPr>
         <p:spPr>
           <a:xfrm>
-            <a:off x="10189377" y="2603505"/>
+            <a:off x="10060588" y="2464142"/>
             <a:ext cx="1080516" cy="412750"/>
           </a:xfrm>
           <a:prstGeom prst="rect">
@@ -4403,13 +4469,13 @@
       </p:sp>
       <p:sp>
         <p:nvSpPr>
-          <p:cNvPr id="22" name="S04-label42"/>
+          <p:cNvPr id="24" name="S04-label44"/>
           <p:cNvSpPr txBox="1"/>
           <p:nvPr/>
         </p:nvSpPr>
         <p:spPr>
           <a:xfrm>
-            <a:off x="7166937" y="3510148"/>
+            <a:off x="7112547" y="3436791"/>
             <a:ext cx="632460" cy="333375"/>
           </a:xfrm>
           <a:prstGeom prst="rect">
@@ -4442,13 +4508,13 @@
       </p:sp>
       <p:sp>
         <p:nvSpPr>
-          <p:cNvPr id="23" name="S04-label44"/>
+          <p:cNvPr id="25" name="S04-label46"/>
           <p:cNvSpPr txBox="1"/>
           <p:nvPr/>
         </p:nvSpPr>
         <p:spPr>
           <a:xfrm>
-            <a:off x="10118271" y="3510148"/>
+            <a:off x="10098024" y="3436791"/>
             <a:ext cx="632460" cy="333375"/>
           </a:xfrm>
           <a:prstGeom prst="rect">
@@ -4481,13 +4547,13 @@
       </p:sp>
       <p:sp>
         <p:nvSpPr>
-          <p:cNvPr id="24" name="S04-label46"/>
+          <p:cNvPr id="26" name="S04-label48"/>
           <p:cNvSpPr txBox="1"/>
           <p:nvPr/>
         </p:nvSpPr>
         <p:spPr>
           <a:xfrm>
-            <a:off x="6971371" y="4355861"/>
+            <a:off x="7100160" y="4516657"/>
             <a:ext cx="433324" cy="412750"/>
           </a:xfrm>
           <a:prstGeom prst="rect">
@@ -4520,13 +4586,13 @@
       </p:sp>
       <p:sp>
         <p:nvSpPr>
-          <p:cNvPr id="25" name="S04-label48"/>
+          <p:cNvPr id="27" name="S04-label50"/>
           <p:cNvSpPr txBox="1"/>
           <p:nvPr/>
         </p:nvSpPr>
         <p:spPr>
           <a:xfrm>
-            <a:off x="8492359" y="4226740"/>
+            <a:off x="8418576" y="4292747"/>
             <a:ext cx="1080516" cy="412750"/>
           </a:xfrm>
           <a:prstGeom prst="rect">
@@ -4559,14 +4625,14 @@
       </p:sp>
       <p:sp>
         <p:nvSpPr>
-          <p:cNvPr id="26" name="S04-label50"/>
+          <p:cNvPr id="28" name="S04-label52"/>
           <p:cNvSpPr txBox="1"/>
           <p:nvPr/>
         </p:nvSpPr>
         <p:spPr>
           <a:xfrm>
-            <a:off x="10242717" y="4099740"/>
-            <a:ext cx="973836" cy="666750"/>
+            <a:off x="10011058" y="4086372"/>
+            <a:ext cx="1179576" cy="825500"/>
           </a:xfrm>
           <a:prstGeom prst="rect">
             <a:avLst/>
@@ -4582,7 +4648,7 @@
               <a:buNone/>
             </a:pPr>
             <a:r>
-              <a:rPr lang="ko-KR" altLang="en-US" sz="2100" b="1" dirty="0">
+              <a:rPr lang="ko-KR" altLang="en-US" sz="2600" b="1" dirty="0">
                 <a:solidFill>
                   <a:srgbClr val="1F2937"/>
                 </a:solidFill>
@@ -4592,14 +4658,14 @@
               </a:rPr>
               <a:t>쓰레기</a:t>
             </a:r>
-            <a:endParaRPr lang="ko-KR" sz="2100" dirty="0"/>
+            <a:endParaRPr lang="ko-KR" sz="2600" dirty="0"/>
           </a:p>
           <a:p>
             <a:pPr eaLnBrk="0" algn="ctr" indent="0" marL="0">
               <a:buNone/>
             </a:pPr>
             <a:r>
-              <a:rPr lang="ko-KR" altLang="en-US" sz="2100" b="1" dirty="0">
+              <a:rPr lang="ko-KR" altLang="en-US" sz="2600" b="1" dirty="0">
                 <a:solidFill>
                   <a:srgbClr val="1F2937"/>
                 </a:solidFill>
@@ -4609,13 +4675,13 @@
               </a:rPr>
               <a:t>쌓인 곳</a:t>
             </a:r>
-            <a:endParaRPr lang="ko-KR" sz="2100" dirty="0"/>
-          </a:p>
-        </p:txBody>
-      </p:sp>
-      <p:sp>
-        <p:nvSpPr>
-          <p:cNvPr id="27" name="S04-chip51"/>
+            <a:endParaRPr lang="ko-KR" sz="2600" dirty="0"/>
+          </a:p>
+        </p:txBody>
+      </p:sp>
+      <p:sp>
+        <p:nvSpPr>
+          <p:cNvPr id="29" name="S04-chip53"/>
           <p:cNvSpPr txBox="1"/>
           <p:nvPr/>
         </p:nvSpPr>
@@ -4662,7 +4728,7 @@
       </p:sp>
       <p:sp>
         <p:nvSpPr>
-          <p:cNvPr id="28" name="S04-text52"/>
+          <p:cNvPr id="30" name="S04-text54"/>
           <p:cNvSpPr txBox="1"/>
           <p:nvPr/>
         </p:nvSpPr>
@@ -4718,7 +4784,7 @@
       </p:sp>
       <p:sp>
         <p:nvSpPr>
-          <p:cNvPr id="29" name="S04-chip53"/>
+          <p:cNvPr id="31" name="S04-chip55"/>
           <p:cNvSpPr txBox="1"/>
           <p:nvPr/>
         </p:nvSpPr>
@@ -4765,7 +4831,7 @@
       </p:sp>
       <p:sp>
         <p:nvSpPr>
-          <p:cNvPr id="30" name="S04-text54"/>
+          <p:cNvPr id="32" name="S04-text56"/>
           <p:cNvSpPr txBox="1"/>
           <p:nvPr/>
         </p:nvSpPr>
@@ -4821,7 +4887,7 @@
       </p:sp>
       <p:sp>
         <p:nvSpPr>
-          <p:cNvPr id="31" name="S04-chip55"/>
+          <p:cNvPr id="33" name="S04-chip57"/>
           <p:cNvSpPr txBox="1"/>
           <p:nvPr/>
         </p:nvSpPr>
@@ -4868,7 +4934,7 @@
       </p:sp>
       <p:sp>
         <p:nvSpPr>
-          <p:cNvPr id="32" name="S04-text56"/>
+          <p:cNvPr id="34" name="S04-text58"/>
           <p:cNvSpPr txBox="1"/>
           <p:nvPr/>
         </p:nvSpPr>
@@ -5038,7 +5104,7 @@
       </p:sp>
       <p:sp>
         <p:nvSpPr>
-          <p:cNvPr id="3" name="S05-text57"/>
+          <p:cNvPr id="3" name="S05-text59"/>
           <p:cNvSpPr txBox="1"/>
           <p:nvPr/>
         </p:nvSpPr>
@@ -5077,7 +5143,7 @@
       </p:sp>
       <p:sp>
         <p:nvSpPr>
-          <p:cNvPr id="4" name="S05-card58"/>
+          <p:cNvPr id="4" name="S05-card60"/>
           <p:cNvSpPr/>
           <p:nvPr/>
         </p:nvSpPr>
@@ -5104,7 +5170,7 @@
       </p:sp>
       <p:sp>
         <p:nvSpPr>
-          <p:cNvPr id="5" name="S05-cardtext59"/>
+          <p:cNvPr id="5" name="S05-cardtext61"/>
           <p:cNvSpPr txBox="1"/>
           <p:nvPr/>
         </p:nvSpPr>
@@ -5146,7 +5212,7 @@
       </p:sp>
       <p:sp>
         <p:nvSpPr>
-          <p:cNvPr id="6" name="S05-card60"/>
+          <p:cNvPr id="6" name="S05-card62"/>
           <p:cNvSpPr/>
           <p:nvPr/>
         </p:nvSpPr>
@@ -5173,7 +5239,7 @@
       </p:sp>
       <p:sp>
         <p:nvSpPr>
-          <p:cNvPr id="7" name="S05-cardtext61"/>
+          <p:cNvPr id="7" name="S05-cardtext63"/>
           <p:cNvSpPr txBox="1"/>
           <p:nvPr/>
         </p:nvSpPr>
@@ -5235,7 +5301,7 @@
       </p:sp>
       <p:sp>
         <p:nvSpPr>
-          <p:cNvPr id="8" name="S05-card62"/>
+          <p:cNvPr id="8" name="S05-card64"/>
           <p:cNvSpPr/>
           <p:nvPr/>
         </p:nvSpPr>
@@ -5262,7 +5328,7 @@
       </p:sp>
       <p:sp>
         <p:nvSpPr>
-          <p:cNvPr id="9" name="S05-cardtext63"/>
+          <p:cNvPr id="9" name="S05-cardtext65"/>
           <p:cNvSpPr txBox="1"/>
           <p:nvPr/>
         </p:nvSpPr>
@@ -5324,7 +5390,7 @@
       </p:sp>
       <p:sp>
         <p:nvSpPr>
-          <p:cNvPr id="10" name="S05-card64"/>
+          <p:cNvPr id="10" name="S05-card66"/>
           <p:cNvSpPr/>
           <p:nvPr/>
         </p:nvSpPr>
@@ -5351,7 +5417,7 @@
       </p:sp>
       <p:sp>
         <p:nvSpPr>
-          <p:cNvPr id="11" name="S05-cardtext65"/>
+          <p:cNvPr id="11" name="S05-cardtext67"/>
           <p:cNvSpPr txBox="1"/>
           <p:nvPr/>
         </p:nvSpPr>
@@ -5413,7 +5479,7 @@
       </p:sp>
       <p:sp>
         <p:nvSpPr>
-          <p:cNvPr id="12" name="S05-card66"/>
+          <p:cNvPr id="12" name="S05-card68"/>
           <p:cNvSpPr/>
           <p:nvPr/>
         </p:nvSpPr>
@@ -5440,7 +5506,7 @@
       </p:sp>
       <p:sp>
         <p:nvSpPr>
-          <p:cNvPr id="13" name="S05-cardtext67"/>
+          <p:cNvPr id="13" name="S05-cardtext69"/>
           <p:cNvSpPr txBox="1"/>
           <p:nvPr/>
         </p:nvSpPr>
@@ -5616,7 +5682,7 @@
       </p:sp>
       <p:sp>
         <p:nvSpPr>
-          <p:cNvPr id="3" name="S06-text68"/>
+          <p:cNvPr id="3" name="S06-text70"/>
           <p:cNvSpPr txBox="1"/>
           <p:nvPr/>
         </p:nvSpPr>
@@ -5655,7 +5721,7 @@
       </p:sp>
       <p:sp>
         <p:nvSpPr>
-          <p:cNvPr id="4" name="S06-card69"/>
+          <p:cNvPr id="4" name="S06-card71"/>
           <p:cNvSpPr/>
           <p:nvPr/>
         </p:nvSpPr>
@@ -5682,7 +5748,7 @@
       </p:sp>
       <p:sp>
         <p:nvSpPr>
-          <p:cNvPr id="5" name="S06-cardtext70"/>
+          <p:cNvPr id="5" name="S06-cardtext72"/>
           <p:cNvSpPr txBox="1"/>
           <p:nvPr/>
         </p:nvSpPr>
@@ -5724,14 +5790,14 @@
       </p:sp>
       <p:sp>
         <p:nvSpPr>
-          <p:cNvPr id="6" name="S06-figure71" descr="지어낸 하늘 마을 지도. 위쪽에 나무 세 그루가 있는 공원, 학교, 공사장이 있고, 가운데로 횡단보도가 있는 큰길이 지나며, 아래쪽에 집, 놀이터, 쓰레기 쌓인 곳이 있다."/>
+          <p:cNvPr id="6" name="S06-figure73" descr="지어낸 하늘 마을 지도. 위쪽에 나무 네 그루가 있는 공원, 학교, 공사장이 있고, 가운데로 횡단보도가 있는 큰길이 지나며, 아래쪽에 집, 놀이터, 쓰레기 쌓인 곳이 있다."/>
           <p:cNvSpPr/>
           <p:nvPr/>
         </p:nvSpPr>
         <p:spPr>
           <a:xfrm>
-            <a:off x="6450199" y="2330289"/>
-            <a:ext cx="1623234" cy="959184"/>
+            <a:off x="6607771" y="2110740"/>
+            <a:ext cx="1418102" cy="1119554"/>
           </a:xfrm>
           <a:custGeom>
             <a:avLst/>
@@ -5740,15 +5806,15 @@
             <a:cxnLst/>
             <a:rect l="l" t="t" r="r" b="b"/>
             <a:pathLst>
-              <a:path w="1623234" h="959184">
+              <a:path w="1418102" h="1119554">
                 <a:moveTo>
-                  <a:pt x="0" y="959184"/>
+                  <a:pt x="0" y="1119554"/>
                 </a:moveTo>
                 <a:lnTo>
-                  <a:pt x="1623234" y="959184"/>
+                  <a:pt x="1418102" y="1119554"/>
                 </a:lnTo>
                 <a:lnTo>
-                  <a:pt x="1623234" y="0"/>
+                  <a:pt x="1418102" y="0"/>
                 </a:lnTo>
                 <a:lnTo>
                   <a:pt x="0" y="0"/>
@@ -5770,14 +5836,14 @@
       </p:sp>
       <p:sp>
         <p:nvSpPr>
-          <p:cNvPr id="7" name="S06-mark72"/>
+          <p:cNvPr id="7" name="S06-mark74"/>
           <p:cNvSpPr/>
           <p:nvPr/>
         </p:nvSpPr>
         <p:spPr>
           <a:xfrm>
-            <a:off x="8294784" y="2330289"/>
-            <a:ext cx="1475667" cy="959184"/>
+            <a:off x="8249783" y="2110740"/>
+            <a:ext cx="1418102" cy="1119554"/>
           </a:xfrm>
           <a:custGeom>
             <a:avLst/>
@@ -5786,15 +5852,15 @@
             <a:cxnLst/>
             <a:rect l="l" t="t" r="r" b="b"/>
             <a:pathLst>
-              <a:path w="1475667" h="959184">
+              <a:path w="1418102" h="1119554">
                 <a:moveTo>
-                  <a:pt x="0" y="959184"/>
+                  <a:pt x="0" y="1119554"/>
                 </a:moveTo>
                 <a:lnTo>
-                  <a:pt x="1475667" y="959184"/>
+                  <a:pt x="1418102" y="1119554"/>
                 </a:lnTo>
                 <a:lnTo>
-                  <a:pt x="1475667" y="0"/>
+                  <a:pt x="1418102" y="0"/>
                 </a:lnTo>
                 <a:lnTo>
                   <a:pt x="0" y="0"/>
@@ -5816,14 +5882,14 @@
       </p:sp>
       <p:sp>
         <p:nvSpPr>
-          <p:cNvPr id="8" name="S06-mark73"/>
+          <p:cNvPr id="8" name="S06-mark75"/>
           <p:cNvSpPr/>
           <p:nvPr/>
         </p:nvSpPr>
         <p:spPr>
           <a:xfrm>
-            <a:off x="9991801" y="2330289"/>
-            <a:ext cx="1475667" cy="959184"/>
+            <a:off x="9891796" y="2110740"/>
+            <a:ext cx="1418102" cy="1119554"/>
           </a:xfrm>
           <a:custGeom>
             <a:avLst/>
@@ -5832,15 +5898,15 @@
             <a:cxnLst/>
             <a:rect l="l" t="t" r="r" b="b"/>
             <a:pathLst>
-              <a:path w="1475667" h="959184">
+              <a:path w="1418102" h="1119554">
                 <a:moveTo>
-                  <a:pt x="0" y="959184"/>
+                  <a:pt x="0" y="1119554"/>
                 </a:moveTo>
                 <a:lnTo>
-                  <a:pt x="1475667" y="959184"/>
+                  <a:pt x="1418102" y="1119554"/>
                 </a:lnTo>
                 <a:lnTo>
-                  <a:pt x="1475667" y="0"/>
+                  <a:pt x="1418102" y="0"/>
                 </a:lnTo>
                 <a:lnTo>
                   <a:pt x="0" y="0"/>
@@ -5862,14 +5928,14 @@
       </p:sp>
       <p:sp>
         <p:nvSpPr>
-          <p:cNvPr id="9" name="S06-mark74"/>
+          <p:cNvPr id="9" name="S06-mark76"/>
           <p:cNvSpPr/>
           <p:nvPr/>
         </p:nvSpPr>
         <p:spPr>
           <a:xfrm>
-            <a:off x="6376416" y="3473931"/>
-            <a:ext cx="5164836" cy="405809"/>
+            <a:off x="6533134" y="3379568"/>
+            <a:ext cx="4851400" cy="447822"/>
           </a:xfrm>
           <a:custGeom>
             <a:avLst/>
@@ -5878,15 +5944,15 @@
             <a:cxnLst/>
             <a:rect l="l" t="t" r="r" b="b"/>
             <a:pathLst>
-              <a:path w="5164836" h="405809">
+              <a:path w="4851400" h="447822">
                 <a:moveTo>
-                  <a:pt x="0" y="405809"/>
+                  <a:pt x="0" y="447822"/>
                 </a:moveTo>
                 <a:lnTo>
-                  <a:pt x="5164836" y="405809"/>
+                  <a:pt x="4851400" y="447822"/>
                 </a:lnTo>
                 <a:lnTo>
-                  <a:pt x="5164836" y="0"/>
+                  <a:pt x="4851400" y="0"/>
                 </a:lnTo>
                 <a:lnTo>
                   <a:pt x="0" y="0"/>
@@ -5903,14 +5969,14 @@
       </p:sp>
       <p:sp>
         <p:nvSpPr>
-          <p:cNvPr id="10" name="S06-mark75"/>
+          <p:cNvPr id="10" name="S06-mark77"/>
           <p:cNvSpPr/>
           <p:nvPr/>
         </p:nvSpPr>
         <p:spPr>
           <a:xfrm>
-            <a:off x="8811267" y="3787510"/>
-            <a:ext cx="442700" cy="55338"/>
+            <a:off x="8734923" y="3726629"/>
+            <a:ext cx="447822" cy="55978"/>
           </a:xfrm>
           <a:custGeom>
             <a:avLst/>
@@ -5919,15 +5985,15 @@
             <a:cxnLst/>
             <a:rect l="l" t="t" r="r" b="b"/>
             <a:pathLst>
-              <a:path w="442700" h="55338">
+              <a:path w="447822" h="55978">
                 <a:moveTo>
-                  <a:pt x="0" y="55338"/>
+                  <a:pt x="0" y="55978"/>
                 </a:moveTo>
                 <a:lnTo>
-                  <a:pt x="442700" y="55338"/>
+                  <a:pt x="447822" y="55978"/>
                 </a:lnTo>
                 <a:lnTo>
-                  <a:pt x="442700" y="0"/>
+                  <a:pt x="447822" y="0"/>
                 </a:lnTo>
                 <a:lnTo>
                   <a:pt x="0" y="0"/>
@@ -5944,14 +6010,14 @@
       </p:sp>
       <p:sp>
         <p:nvSpPr>
-          <p:cNvPr id="11" name="S06-mark76"/>
+          <p:cNvPr id="11" name="S06-mark78"/>
           <p:cNvSpPr/>
           <p:nvPr/>
         </p:nvSpPr>
         <p:spPr>
           <a:xfrm>
-            <a:off x="8811267" y="3676835"/>
-            <a:ext cx="442700" cy="55338"/>
+            <a:off x="8734923" y="3614674"/>
+            <a:ext cx="447822" cy="55978"/>
           </a:xfrm>
           <a:custGeom>
             <a:avLst/>
@@ -5960,15 +6026,15 @@
             <a:cxnLst/>
             <a:rect l="l" t="t" r="r" b="b"/>
             <a:pathLst>
-              <a:path w="442700" h="55338">
+              <a:path w="447822" h="55978">
                 <a:moveTo>
-                  <a:pt x="0" y="55338"/>
+                  <a:pt x="0" y="55978"/>
                 </a:moveTo>
                 <a:lnTo>
-                  <a:pt x="442700" y="55338"/>
+                  <a:pt x="447822" y="55978"/>
                 </a:lnTo>
                 <a:lnTo>
-                  <a:pt x="442700" y="0"/>
+                  <a:pt x="447822" y="0"/>
                 </a:lnTo>
                 <a:lnTo>
                   <a:pt x="0" y="0"/>
@@ -5985,14 +6051,14 @@
       </p:sp>
       <p:sp>
         <p:nvSpPr>
-          <p:cNvPr id="12" name="S06-mark77"/>
+          <p:cNvPr id="12" name="S06-mark79"/>
           <p:cNvSpPr/>
           <p:nvPr/>
         </p:nvSpPr>
         <p:spPr>
           <a:xfrm>
-            <a:off x="8811267" y="3566160"/>
-            <a:ext cx="442700" cy="55338"/>
+            <a:off x="8734923" y="3502719"/>
+            <a:ext cx="447822" cy="55978"/>
           </a:xfrm>
           <a:custGeom>
             <a:avLst/>
@@ -6001,15 +6067,15 @@
             <a:cxnLst/>
             <a:rect l="l" t="t" r="r" b="b"/>
             <a:pathLst>
-              <a:path w="442700" h="55338">
+              <a:path w="447822" h="55978">
                 <a:moveTo>
-                  <a:pt x="0" y="55338"/>
+                  <a:pt x="0" y="55978"/>
                 </a:moveTo>
                 <a:lnTo>
-                  <a:pt x="442700" y="55338"/>
+                  <a:pt x="447822" y="55978"/>
                 </a:lnTo>
                 <a:lnTo>
-                  <a:pt x="442700" y="0"/>
+                  <a:pt x="447822" y="0"/>
                 </a:lnTo>
                 <a:lnTo>
                   <a:pt x="0" y="0"/>
@@ -6026,14 +6092,14 @@
       </p:sp>
       <p:sp>
         <p:nvSpPr>
-          <p:cNvPr id="13" name="S06-mark78"/>
+          <p:cNvPr id="13" name="S06-mark80"/>
           <p:cNvSpPr/>
           <p:nvPr/>
         </p:nvSpPr>
         <p:spPr>
           <a:xfrm>
-            <a:off x="6597766" y="4027306"/>
-            <a:ext cx="1180534" cy="774725"/>
+            <a:off x="8734923" y="3390763"/>
+            <a:ext cx="447822" cy="55978"/>
           </a:xfrm>
           <a:custGeom>
             <a:avLst/>
@@ -6042,21 +6108,62 @@
             <a:cxnLst/>
             <a:rect l="l" t="t" r="r" b="b"/>
             <a:pathLst>
-              <a:path w="1180534" h="774725">
+              <a:path w="447822" h="55978">
                 <a:moveTo>
-                  <a:pt x="0" y="774725"/>
+                  <a:pt x="0" y="55978"/>
                 </a:moveTo>
                 <a:lnTo>
-                  <a:pt x="1180534" y="774725"/>
+                  <a:pt x="447822" y="55978"/>
                 </a:lnTo>
                 <a:lnTo>
-                  <a:pt x="1180534" y="295133"/>
+                  <a:pt x="447822" y="0"/>
                 </a:lnTo>
                 <a:lnTo>
-                  <a:pt x="590267" y="0"/>
+                  <a:pt x="0" y="0"/>
+                </a:lnTo>
+                <a:close/>
+              </a:path>
+            </a:pathLst>
+          </a:custGeom>
+          <a:solidFill>
+            <a:srgbClr val="FFFFFF"/>
+          </a:solidFill>
+          <a:ln/>
+        </p:spPr>
+      </p:sp>
+      <p:sp>
+        <p:nvSpPr>
+          <p:cNvPr id="14" name="S06-mark81"/>
+          <p:cNvSpPr/>
+          <p:nvPr/>
+        </p:nvSpPr>
+        <p:spPr>
+          <a:xfrm>
+            <a:off x="6757045" y="4051300"/>
+            <a:ext cx="1119554" cy="970280"/>
+          </a:xfrm>
+          <a:custGeom>
+            <a:avLst/>
+            <a:gdLst/>
+            <a:ahLst/>
+            <a:cxnLst/>
+            <a:rect l="l" t="t" r="r" b="b"/>
+            <a:pathLst>
+              <a:path w="1119554" h="970280">
+                <a:moveTo>
+                  <a:pt x="0" y="970280"/>
+                </a:moveTo>
+                <a:lnTo>
+                  <a:pt x="1119554" y="970280"/>
                 </a:lnTo>
                 <a:lnTo>
-                  <a:pt x="0" y="295133"/>
+                  <a:pt x="1119554" y="373185"/>
+                </a:lnTo>
+                <a:lnTo>
+                  <a:pt x="559777" y="0"/>
+                </a:lnTo>
+                <a:lnTo>
+                  <a:pt x="0" y="373185"/>
                 </a:lnTo>
                 <a:close/>
               </a:path>
@@ -6075,14 +6182,14 @@
       </p:sp>
       <p:sp>
         <p:nvSpPr>
-          <p:cNvPr id="14" name="S06-mark79"/>
+          <p:cNvPr id="15" name="S06-mark82"/>
           <p:cNvSpPr/>
           <p:nvPr/>
         </p:nvSpPr>
         <p:spPr>
           <a:xfrm>
-            <a:off x="8294784" y="4064198"/>
-            <a:ext cx="1475667" cy="737834"/>
+            <a:off x="8249783" y="3976663"/>
+            <a:ext cx="1418102" cy="1044917"/>
           </a:xfrm>
           <a:custGeom>
             <a:avLst/>
@@ -6091,15 +6198,15 @@
             <a:cxnLst/>
             <a:rect l="l" t="t" r="r" b="b"/>
             <a:pathLst>
-              <a:path w="1475667" h="737834">
+              <a:path w="1418102" h="1044917">
                 <a:moveTo>
-                  <a:pt x="0" y="737834"/>
+                  <a:pt x="0" y="1044917"/>
                 </a:moveTo>
                 <a:lnTo>
-                  <a:pt x="1475667" y="737834"/>
+                  <a:pt x="1418102" y="1044917"/>
                 </a:lnTo>
                 <a:lnTo>
-                  <a:pt x="1475667" y="0"/>
+                  <a:pt x="1418102" y="0"/>
                 </a:lnTo>
                 <a:lnTo>
                   <a:pt x="0" y="0"/>
@@ -6121,14 +6228,14 @@
       </p:sp>
       <p:sp>
         <p:nvSpPr>
-          <p:cNvPr id="15" name="S06-mark80"/>
+          <p:cNvPr id="16" name="S06-mark83"/>
           <p:cNvSpPr/>
           <p:nvPr/>
         </p:nvSpPr>
         <p:spPr>
           <a:xfrm>
-            <a:off x="9991801" y="4064198"/>
-            <a:ext cx="1475667" cy="737834"/>
+            <a:off x="9891796" y="3976663"/>
+            <a:ext cx="1418102" cy="1044917"/>
           </a:xfrm>
           <a:custGeom>
             <a:avLst/>
@@ -6137,15 +6244,15 @@
             <a:cxnLst/>
             <a:rect l="l" t="t" r="r" b="b"/>
             <a:pathLst>
-              <a:path w="1475667" h="737834">
+              <a:path w="1418102" h="1044917">
                 <a:moveTo>
-                  <a:pt x="0" y="737834"/>
+                  <a:pt x="0" y="1044917"/>
                 </a:moveTo>
                 <a:lnTo>
-                  <a:pt x="1475667" y="737834"/>
+                  <a:pt x="1418102" y="1044917"/>
                 </a:lnTo>
                 <a:lnTo>
-                  <a:pt x="1475667" y="0"/>
+                  <a:pt x="1418102" y="0"/>
                 </a:lnTo>
                 <a:lnTo>
                   <a:pt x="0" y="0"/>
@@ -6167,14 +6274,14 @@
       </p:sp>
       <p:sp>
         <p:nvSpPr>
-          <p:cNvPr id="16" name="S06-mark81"/>
+          <p:cNvPr id="17" name="S06-mark84"/>
           <p:cNvSpPr/>
           <p:nvPr/>
         </p:nvSpPr>
         <p:spPr>
           <a:xfrm>
-            <a:off x="6560874" y="2440964"/>
-            <a:ext cx="368917" cy="368917"/>
+            <a:off x="6682408" y="2222695"/>
+            <a:ext cx="373185" cy="373185"/>
           </a:xfrm>
           <a:prstGeom prst="ellipse">
             <a:avLst/>
@@ -6192,14 +6299,14 @@
       </p:sp>
       <p:sp>
         <p:nvSpPr>
-          <p:cNvPr id="17" name="S06-mark82"/>
+          <p:cNvPr id="18" name="S06-mark85"/>
           <p:cNvSpPr/>
           <p:nvPr/>
         </p:nvSpPr>
         <p:spPr>
           <a:xfrm>
-            <a:off x="6966683" y="2404072"/>
-            <a:ext cx="368917" cy="368917"/>
+            <a:off x="7092911" y="2185377"/>
+            <a:ext cx="373185" cy="373185"/>
           </a:xfrm>
           <a:prstGeom prst="ellipse">
             <a:avLst/>
@@ -6217,14 +6324,14 @@
       </p:sp>
       <p:sp>
         <p:nvSpPr>
-          <p:cNvPr id="18" name="S06-mark83"/>
+          <p:cNvPr id="19" name="S06-mark86"/>
           <p:cNvSpPr/>
           <p:nvPr/>
         </p:nvSpPr>
         <p:spPr>
           <a:xfrm>
-            <a:off x="6708441" y="2846772"/>
-            <a:ext cx="368917" cy="368917"/>
+            <a:off x="7503414" y="2222695"/>
+            <a:ext cx="373185" cy="373185"/>
           </a:xfrm>
           <a:prstGeom prst="ellipse">
             <a:avLst/>
@@ -6242,13 +6349,38 @@
       </p:sp>
       <p:sp>
         <p:nvSpPr>
-          <p:cNvPr id="19" name="S06-label85"/>
+          <p:cNvPr id="20" name="S06-mark87"/>
+          <p:cNvSpPr/>
+          <p:nvPr/>
+        </p:nvSpPr>
+        <p:spPr>
+          <a:xfrm>
+            <a:off x="6719726" y="2670517"/>
+            <a:ext cx="373185" cy="373185"/>
+          </a:xfrm>
+          <a:prstGeom prst="ellipse">
+            <a:avLst/>
+          </a:prstGeom>
+          <a:solidFill>
+            <a:srgbClr val="2A9D8F"/>
+          </a:solidFill>
+          <a:ln w="28575">
+            <a:solidFill>
+              <a:srgbClr val="1F2937"/>
+            </a:solidFill>
+            <a:prstDash val="solid"/>
+          </a:ln>
+        </p:spPr>
+      </p:sp>
+      <p:sp>
+        <p:nvSpPr>
+          <p:cNvPr id="21" name="S06-label89"/>
           <p:cNvSpPr txBox="1"/>
           <p:nvPr/>
         </p:nvSpPr>
         <p:spPr>
           <a:xfrm>
-            <a:off x="7289165" y="2603505"/>
+            <a:off x="7199591" y="2762690"/>
             <a:ext cx="756920" cy="412750"/>
           </a:xfrm>
           <a:prstGeom prst="rect">
@@ -6281,13 +6413,13 @@
       </p:sp>
       <p:sp>
         <p:nvSpPr>
-          <p:cNvPr id="20" name="S06-label87"/>
+          <p:cNvPr id="22" name="S06-label91"/>
           <p:cNvSpPr txBox="1"/>
           <p:nvPr/>
         </p:nvSpPr>
         <p:spPr>
           <a:xfrm>
-            <a:off x="8654157" y="2603505"/>
+            <a:off x="8580374" y="2464142"/>
             <a:ext cx="756920" cy="412750"/>
           </a:xfrm>
           <a:prstGeom prst="rect">
@@ -6320,13 +6452,13 @@
       </p:sp>
       <p:sp>
         <p:nvSpPr>
-          <p:cNvPr id="21" name="S06-label89"/>
+          <p:cNvPr id="23" name="S06-label93"/>
           <p:cNvSpPr txBox="1"/>
           <p:nvPr/>
         </p:nvSpPr>
         <p:spPr>
           <a:xfrm>
-            <a:off x="10189377" y="2603505"/>
+            <a:off x="10060588" y="2464142"/>
             <a:ext cx="1080516" cy="412750"/>
           </a:xfrm>
           <a:prstGeom prst="rect">
@@ -6359,13 +6491,13 @@
       </p:sp>
       <p:sp>
         <p:nvSpPr>
-          <p:cNvPr id="22" name="S06-label91"/>
+          <p:cNvPr id="24" name="S06-label95"/>
           <p:cNvSpPr txBox="1"/>
           <p:nvPr/>
         </p:nvSpPr>
         <p:spPr>
           <a:xfrm>
-            <a:off x="7166937" y="3510148"/>
+            <a:off x="7112547" y="3436791"/>
             <a:ext cx="632460" cy="333375"/>
           </a:xfrm>
           <a:prstGeom prst="rect">
@@ -6398,13 +6530,13 @@
       </p:sp>
       <p:sp>
         <p:nvSpPr>
-          <p:cNvPr id="23" name="S06-label93"/>
+          <p:cNvPr id="25" name="S06-label97"/>
           <p:cNvSpPr txBox="1"/>
           <p:nvPr/>
         </p:nvSpPr>
         <p:spPr>
           <a:xfrm>
-            <a:off x="10118271" y="3510148"/>
+            <a:off x="10098024" y="3436791"/>
             <a:ext cx="632460" cy="333375"/>
           </a:xfrm>
           <a:prstGeom prst="rect">
@@ -6437,13 +6569,13 @@
       </p:sp>
       <p:sp>
         <p:nvSpPr>
-          <p:cNvPr id="24" name="S06-label95"/>
+          <p:cNvPr id="26" name="S06-label99"/>
           <p:cNvSpPr txBox="1"/>
           <p:nvPr/>
         </p:nvSpPr>
         <p:spPr>
           <a:xfrm>
-            <a:off x="6971371" y="4355861"/>
+            <a:off x="7100160" y="4516657"/>
             <a:ext cx="433324" cy="412750"/>
           </a:xfrm>
           <a:prstGeom prst="rect">
@@ -6476,13 +6608,13 @@
       </p:sp>
       <p:sp>
         <p:nvSpPr>
-          <p:cNvPr id="25" name="S06-label97"/>
+          <p:cNvPr id="27" name="S06-label101"/>
           <p:cNvSpPr txBox="1"/>
           <p:nvPr/>
         </p:nvSpPr>
         <p:spPr>
           <a:xfrm>
-            <a:off x="8492359" y="4226740"/>
+            <a:off x="8418576" y="4292747"/>
             <a:ext cx="1080516" cy="412750"/>
           </a:xfrm>
           <a:prstGeom prst="rect">
@@ -6515,14 +6647,14 @@
       </p:sp>
       <p:sp>
         <p:nvSpPr>
-          <p:cNvPr id="26" name="S06-label99"/>
+          <p:cNvPr id="28" name="S06-label103"/>
           <p:cNvSpPr txBox="1"/>
           <p:nvPr/>
         </p:nvSpPr>
         <p:spPr>
           <a:xfrm>
-            <a:off x="10242717" y="4099740"/>
-            <a:ext cx="973836" cy="666750"/>
+            <a:off x="10011058" y="4086372"/>
+            <a:ext cx="1179576" cy="825500"/>
           </a:xfrm>
           <a:prstGeom prst="rect">
             <a:avLst/>
@@ -6538,7 +6670,7 @@
               <a:buNone/>
             </a:pPr>
             <a:r>
-              <a:rPr lang="ko-KR" altLang="en-US" sz="2100" b="1" dirty="0">
+              <a:rPr lang="ko-KR" altLang="en-US" sz="2600" b="1" dirty="0">
                 <a:solidFill>
                   <a:srgbClr val="1F2937"/>
                 </a:solidFill>
@@ -6548,14 +6680,14 @@
               </a:rPr>
               <a:t>쓰레기</a:t>
             </a:r>
-            <a:endParaRPr lang="ko-KR" sz="2100" dirty="0"/>
+            <a:endParaRPr lang="ko-KR" sz="2600" dirty="0"/>
           </a:p>
           <a:p>
             <a:pPr eaLnBrk="0" algn="ctr" indent="0" marL="0">
               <a:buNone/>
             </a:pPr>
             <a:r>
-              <a:rPr lang="ko-KR" altLang="en-US" sz="2100" b="1" dirty="0">
+              <a:rPr lang="ko-KR" altLang="en-US" sz="2600" b="1" dirty="0">
                 <a:solidFill>
                   <a:srgbClr val="1F2937"/>
                 </a:solidFill>
@@ -6565,13 +6697,13 @@
               </a:rPr>
               <a:t>쌓인 곳</a:t>
             </a:r>
-            <a:endParaRPr lang="ko-KR" sz="2100" dirty="0"/>
-          </a:p>
-        </p:txBody>
-      </p:sp>
-      <p:sp>
-        <p:nvSpPr>
-          <p:cNvPr id="27" name="S06-chip100"/>
+            <a:endParaRPr lang="ko-KR" sz="2600" dirty="0"/>
+          </a:p>
+        </p:txBody>
+      </p:sp>
+      <p:sp>
+        <p:nvSpPr>
+          <p:cNvPr id="29" name="S06-chip104"/>
           <p:cNvSpPr txBox="1"/>
           <p:nvPr/>
         </p:nvSpPr>
@@ -6618,7 +6750,7 @@
       </p:sp>
       <p:sp>
         <p:nvSpPr>
-          <p:cNvPr id="28" name="S06-text101"/>
+          <p:cNvPr id="30" name="S06-text105"/>
           <p:cNvSpPr txBox="1"/>
           <p:nvPr/>
         </p:nvSpPr>
@@ -6674,7 +6806,7 @@
       </p:sp>
       <p:sp>
         <p:nvSpPr>
-          <p:cNvPr id="29" name="S06-chip102"/>
+          <p:cNvPr id="31" name="S06-chip106"/>
           <p:cNvSpPr txBox="1"/>
           <p:nvPr/>
         </p:nvSpPr>
@@ -6721,7 +6853,7 @@
       </p:sp>
       <p:sp>
         <p:nvSpPr>
-          <p:cNvPr id="30" name="S06-text103"/>
+          <p:cNvPr id="32" name="S06-text107"/>
           <p:cNvSpPr txBox="1"/>
           <p:nvPr/>
         </p:nvSpPr>
@@ -6777,7 +6909,7 @@
       </p:sp>
       <p:sp>
         <p:nvSpPr>
-          <p:cNvPr id="31" name="S06-chip104"/>
+          <p:cNvPr id="33" name="S06-chip108"/>
           <p:cNvSpPr txBox="1"/>
           <p:nvPr/>
         </p:nvSpPr>
@@ -6824,7 +6956,7 @@
       </p:sp>
       <p:sp>
         <p:nvSpPr>
-          <p:cNvPr id="32" name="S06-text105"/>
+          <p:cNvPr id="34" name="S06-text109"/>
           <p:cNvSpPr txBox="1"/>
           <p:nvPr/>
         </p:nvSpPr>
@@ -6994,7 +7126,7 @@
       </p:sp>
       <p:sp>
         <p:nvSpPr>
-          <p:cNvPr id="3" name="S07-card106"/>
+          <p:cNvPr id="3" name="S07-card110"/>
           <p:cNvSpPr/>
           <p:nvPr/>
         </p:nvSpPr>
@@ -7021,7 +7153,7 @@
       </p:sp>
       <p:sp>
         <p:nvSpPr>
-          <p:cNvPr id="4" name="S07-cardtext107"/>
+          <p:cNvPr id="4" name="S07-cardtext111"/>
           <p:cNvSpPr txBox="1"/>
           <p:nvPr/>
         </p:nvSpPr>
@@ -7083,7 +7215,7 @@
       </p:sp>
       <p:sp>
         <p:nvSpPr>
-          <p:cNvPr id="5" name="S07-card108"/>
+          <p:cNvPr id="5" name="S07-card112"/>
           <p:cNvSpPr/>
           <p:nvPr/>
         </p:nvSpPr>
@@ -7110,7 +7242,7 @@
       </p:sp>
       <p:sp>
         <p:nvSpPr>
-          <p:cNvPr id="6" name="S07-cardtext109"/>
+          <p:cNvPr id="6" name="S07-cardtext113"/>
           <p:cNvSpPr txBox="1"/>
           <p:nvPr/>
         </p:nvSpPr>
@@ -7164,7 +7296,7 @@
                 <a:ea typeface="맑은 고딕" pitchFamily="34" charset="-122"/>
                 <a:cs typeface="맑은 고딕" pitchFamily="34" charset="-120"/>
               </a:rPr>
-              <a:t>☐ 세 가지 넘게 적었어요</a:t>
+              <a:t>☐ 세 가지를 적었어요</a:t>
             </a:r>
             <a:endParaRPr lang="ko-KR" sz="3200" dirty="0"/>
           </a:p>
@@ -7232,13 +7364,13 @@
       </p:sp>
       <p:sp>
         <p:nvSpPr>
-          <p:cNvPr id="7" name="S07-stepno110"/>
+          <p:cNvPr id="7" name="S07-stepno114"/>
           <p:cNvSpPr txBox="1"/>
           <p:nvPr/>
         </p:nvSpPr>
         <p:spPr>
           <a:xfrm>
-            <a:off x="548640" y="1477264"/>
+            <a:off x="548640" y="1653032"/>
             <a:ext cx="548640" cy="548640"/>
           </a:xfrm>
           <a:prstGeom prst="ellipse">
@@ -7277,14 +7409,14 @@
       </p:sp>
       <p:sp>
         <p:nvSpPr>
-          <p:cNvPr id="8" name="S07-text111"/>
+          <p:cNvPr id="8" name="S07-text115"/>
           <p:cNvSpPr txBox="1"/>
           <p:nvPr/>
         </p:nvSpPr>
         <p:spPr>
           <a:xfrm>
-            <a:off x="1325880" y="1431544"/>
-            <a:ext cx="5122012" cy="991616"/>
+            <a:off x="1325880" y="1653032"/>
+            <a:ext cx="5122012" cy="548640"/>
           </a:xfrm>
           <a:prstGeom prst="rect">
             <a:avLst/>
@@ -7308,7 +7440,7 @@
                 <a:ea typeface="맑은 고딕" pitchFamily="34" charset="-122"/>
                 <a:cs typeface="맑은 고딕" pitchFamily="34" charset="-120"/>
               </a:rPr>
-              <a:t>어른과 함께 10분쯤 걸어요.</a:t>
+              <a:t>어른과 함께 걸어요.</a:t>
             </a:r>
             <a:endParaRPr lang="ko-KR" sz="3200" dirty="0"/>
           </a:p>
@@ -7316,13 +7448,13 @@
       </p:sp>
       <p:sp>
         <p:nvSpPr>
-          <p:cNvPr id="9" name="S07-stepno112"/>
+          <p:cNvPr id="9" name="S07-stepno116"/>
           <p:cNvSpPr txBox="1"/>
           <p:nvPr/>
         </p:nvSpPr>
         <p:spPr>
           <a:xfrm>
-            <a:off x="548640" y="2587752"/>
+            <a:off x="548640" y="2366264"/>
             <a:ext cx="548640" cy="548640"/>
           </a:xfrm>
           <a:prstGeom prst="ellipse">
@@ -7361,13 +7493,13 @@
       </p:sp>
       <p:sp>
         <p:nvSpPr>
-          <p:cNvPr id="10" name="S07-text113"/>
+          <p:cNvPr id="10" name="S07-text117"/>
           <p:cNvSpPr txBox="1"/>
           <p:nvPr/>
         </p:nvSpPr>
         <p:spPr>
           <a:xfrm>
-            <a:off x="1325880" y="2587752"/>
+            <a:off x="1325880" y="2366264"/>
             <a:ext cx="5122012" cy="548640"/>
           </a:xfrm>
           <a:prstGeom prst="rect">
@@ -7400,13 +7532,13 @@
       </p:sp>
       <p:sp>
         <p:nvSpPr>
-          <p:cNvPr id="11" name="S07-stepno114"/>
+          <p:cNvPr id="11" name="S07-stepno118"/>
           <p:cNvSpPr txBox="1"/>
           <p:nvPr/>
         </p:nvSpPr>
         <p:spPr>
           <a:xfrm>
-            <a:off x="548640" y="3300984"/>
+            <a:off x="548640" y="3079496"/>
             <a:ext cx="548640" cy="548640"/>
           </a:xfrm>
           <a:prstGeom prst="ellipse">
@@ -7445,13 +7577,13 @@
       </p:sp>
       <p:sp>
         <p:nvSpPr>
-          <p:cNvPr id="12" name="S07-text115"/>
+          <p:cNvPr id="12" name="S07-text119"/>
           <p:cNvSpPr txBox="1"/>
           <p:nvPr/>
         </p:nvSpPr>
         <p:spPr>
           <a:xfrm>
-            <a:off x="1325880" y="3300984"/>
+            <a:off x="1325880" y="3079496"/>
             <a:ext cx="5122012" cy="548640"/>
           </a:xfrm>
           <a:prstGeom prst="rect">
@@ -7484,13 +7616,13 @@
       </p:sp>
       <p:sp>
         <p:nvSpPr>
-          <p:cNvPr id="13" name="S07-stepno116"/>
+          <p:cNvPr id="13" name="S07-stepno120"/>
           <p:cNvSpPr txBox="1"/>
           <p:nvPr/>
         </p:nvSpPr>
         <p:spPr>
           <a:xfrm>
-            <a:off x="548640" y="4014216"/>
+            <a:off x="548640" y="3792728"/>
             <a:ext cx="548640" cy="548640"/>
           </a:xfrm>
           <a:prstGeom prst="ellipse">
@@ -7529,13 +7661,13 @@
       </p:sp>
       <p:sp>
         <p:nvSpPr>
-          <p:cNvPr id="14" name="S07-text117"/>
+          <p:cNvPr id="14" name="S07-text121"/>
           <p:cNvSpPr txBox="1"/>
           <p:nvPr/>
         </p:nvSpPr>
         <p:spPr>
           <a:xfrm>
-            <a:off x="1325880" y="4014216"/>
+            <a:off x="1325880" y="3792728"/>
             <a:ext cx="5122012" cy="548640"/>
           </a:xfrm>
           <a:prstGeom prst="rect">
@@ -7682,7 +7814,7 @@
       </p:sp>
       <p:sp>
         <p:nvSpPr>
-          <p:cNvPr id="3" name="S08-card118"/>
+          <p:cNvPr id="3" name="S08-card122"/>
           <p:cNvSpPr/>
           <p:nvPr/>
         </p:nvSpPr>
@@ -7709,7 +7841,7 @@
       </p:sp>
       <p:sp>
         <p:nvSpPr>
-          <p:cNvPr id="4" name="S08-cardtext119"/>
+          <p:cNvPr id="4" name="S08-cardtext123"/>
           <p:cNvSpPr txBox="1"/>
           <p:nvPr/>
         </p:nvSpPr>
@@ -7751,7 +7883,7 @@
       </p:sp>
       <p:sp>
         <p:nvSpPr>
-          <p:cNvPr id="5" name="S08-chip120"/>
+          <p:cNvPr id="5" name="S08-chip124"/>
           <p:cNvSpPr txBox="1"/>
           <p:nvPr/>
         </p:nvSpPr>
@@ -7798,7 +7930,7 @@
       </p:sp>
       <p:sp>
         <p:nvSpPr>
-          <p:cNvPr id="6" name="S08-chip121"/>
+          <p:cNvPr id="6" name="S08-chip125"/>
           <p:cNvSpPr txBox="1"/>
           <p:nvPr/>
         </p:nvSpPr>
@@ -7845,7 +7977,7 @@
       </p:sp>
       <p:sp>
         <p:nvSpPr>
-          <p:cNvPr id="7" name="S08-text122"/>
+          <p:cNvPr id="7" name="S08-text126"/>
           <p:cNvSpPr txBox="1"/>
           <p:nvPr/>
         </p:nvSpPr>
@@ -7884,7 +8016,7 @@
       </p:sp>
       <p:sp>
         <p:nvSpPr>
-          <p:cNvPr id="8" name="S08-text123"/>
+          <p:cNvPr id="8" name="S08-text127"/>
           <p:cNvSpPr txBox="1"/>
           <p:nvPr/>
         </p:nvSpPr>
@@ -7940,7 +8072,7 @@
       </p:sp>
       <p:sp>
         <p:nvSpPr>
-          <p:cNvPr id="9" name="S08-text124"/>
+          <p:cNvPr id="9" name="S08-text128"/>
           <p:cNvSpPr txBox="1"/>
           <p:nvPr/>
         </p:nvSpPr>
@@ -7996,7 +8128,7 @@
       </p:sp>
       <p:sp>
         <p:nvSpPr>
-          <p:cNvPr id="10" name="S08-text125"/>
+          <p:cNvPr id="10" name="S08-text129"/>
           <p:cNvSpPr txBox="1"/>
           <p:nvPr/>
         </p:nvSpPr>
@@ -8052,7 +8184,7 @@
       </p:sp>
       <p:sp>
         <p:nvSpPr>
-          <p:cNvPr id="11" name="S08-text126"/>
+          <p:cNvPr id="11" name="S08-text130"/>
           <p:cNvSpPr txBox="1"/>
           <p:nvPr/>
         </p:nvSpPr>
@@ -8205,7 +8337,7 @@
       </p:sp>
       <p:sp>
         <p:nvSpPr>
-          <p:cNvPr id="3" name="S09-text127"/>
+          <p:cNvPr id="3" name="S09-text131"/>
           <p:cNvSpPr txBox="1"/>
           <p:nvPr/>
         </p:nvSpPr>
@@ -8244,7 +8376,7 @@
       </p:sp>
       <p:sp>
         <p:nvSpPr>
-          <p:cNvPr id="4" name="S09-card128"/>
+          <p:cNvPr id="4" name="S09-card132"/>
           <p:cNvSpPr/>
           <p:nvPr/>
         </p:nvSpPr>
@@ -8271,7 +8403,7 @@
       </p:sp>
       <p:sp>
         <p:nvSpPr>
-          <p:cNvPr id="5" name="S09-cardtext129"/>
+          <p:cNvPr id="5" name="S09-cardtext133"/>
           <p:cNvSpPr txBox="1"/>
           <p:nvPr/>
         </p:nvSpPr>
@@ -8313,7 +8445,7 @@
       </p:sp>
       <p:sp>
         <p:nvSpPr>
-          <p:cNvPr id="6" name="S09-card130"/>
+          <p:cNvPr id="6" name="S09-card134"/>
           <p:cNvSpPr/>
           <p:nvPr/>
         </p:nvSpPr>
@@ -8340,7 +8472,7 @@
       </p:sp>
       <p:sp>
         <p:nvSpPr>
-          <p:cNvPr id="7" name="S09-cardtext131"/>
+          <p:cNvPr id="7" name="S09-cardtext135"/>
           <p:cNvSpPr txBox="1"/>
           <p:nvPr/>
         </p:nvSpPr>
@@ -8402,7 +8534,7 @@
       </p:sp>
       <p:sp>
         <p:nvSpPr>
-          <p:cNvPr id="8" name="S09-card132"/>
+          <p:cNvPr id="8" name="S09-card136"/>
           <p:cNvSpPr/>
           <p:nvPr/>
         </p:nvSpPr>
@@ -8429,7 +8561,7 @@
       </p:sp>
       <p:sp>
         <p:nvSpPr>
-          <p:cNvPr id="9" name="S09-cardtext133"/>
+          <p:cNvPr id="9" name="S09-cardtext137"/>
           <p:cNvSpPr txBox="1"/>
           <p:nvPr/>
         </p:nvSpPr>
@@ -8491,7 +8623,7 @@
       </p:sp>
       <p:sp>
         <p:nvSpPr>
-          <p:cNvPr id="10" name="S09-card134"/>
+          <p:cNvPr id="10" name="S09-card138"/>
           <p:cNvSpPr/>
           <p:nvPr/>
         </p:nvSpPr>
@@ -8518,7 +8650,7 @@
       </p:sp>
       <p:sp>
         <p:nvSpPr>
-          <p:cNvPr id="11" name="S09-cardtext135"/>
+          <p:cNvPr id="11" name="S09-cardtext139"/>
           <p:cNvSpPr txBox="1"/>
           <p:nvPr/>
         </p:nvSpPr>

--- a/dist/초2/환경·생태/생활과환경/초2_환경·생태_생활과환경_01_학교와마을의환경.pptx
+++ b/dist/초2/환경·생태/생활과환경/초2_환경·생태_생활과환경_01_학교와마을의환경.pptx
@@ -115,41 +115,41 @@
   <p:extLst>
     <p:ext uri="{521415D9-36F7-43E2-AB2F-B90AF26B5E84}">
       <p14:sectionLst xmlns:p14="http://schemas.microsoft.com/office/powerpoint/2010/main">
-        <p14:section name="도입" id="{507b3ce8-5142-120b-d3a2-4fc823f8ea2b}">
+        <p14:section name="도입" id="{d0006111-5f2b-e3d7-87eb-d507edd95787}">
           <p14:sldIdLst>
             <p14:sldId id="256"/>
             <p14:sldId id="257"/>
           </p14:sldIdLst>
         </p14:section>
-        <p14:section name="개념" id="{01c6dc3f-3064-afb5-5861-d037c13bd021}">
+        <p14:section name="개념" id="{30d08e42-cfe0-828e-40eb-bbed3f9608b2}">
           <p14:sldIdLst>
             <p14:sldId id="258"/>
             <p14:sldId id="260"/>
           </p14:sldIdLst>
         </p14:section>
-        <p14:section name="연습" id="{a84e1101-f727-ba63-e93d-e66fbfdb06c4}">
+        <p14:section name="연습" id="{6df8d4fb-fd0f-6b62-d448-ccde667b208c}">
           <p14:sldIdLst>
             <p14:sldId id="259"/>
             <p14:sldId id="261"/>
           </p14:sldIdLst>
         </p14:section>
-        <p14:section name="개념" id="{4cb460d4-fb2d-3423-4c9f-a1d9ba94be3d}">
+        <p14:section name="개념" id="{e69c3c26-5cc3-0e03-7e3a-722a14bde1f1}">
           <p14:sldIdLst/>
         </p14:section>
-        <p14:section name="연습" id="{75d157f6-afc9-af28-382a-700c57ce3399}">
+        <p14:section name="연습" id="{debaa79c-4fea-1050-0f38-79a363b3f5ca}">
           <p14:sldIdLst/>
         </p14:section>
-        <p14:section name="확인" id="{1c560a26-fac1-102e-7891-4646ed3d61ad}">
+        <p14:section name="확인" id="{42de8374-ac47-cdab-2fd3-edd9f3080f78}">
           <p14:sldIdLst>
             <p14:sldId id="262"/>
           </p14:sldIdLst>
         </p14:section>
-        <p14:section name="정리" id="{08ce2390-1dba-8a89-1bf7-f4d0a6a6ab39}">
+        <p14:section name="정리" id="{4fbf6daa-b5be-721a-e5ca-24df183a680e}">
           <p14:sldIdLst>
             <p14:sldId id="263"/>
           </p14:sldIdLst>
         </p14:section>
-        <p14:section name="보충" id="{cb1e34a7-b98d-3fa9-73cb-bce236690f33}">
+        <p14:section name="보충" id="{26a27f17-dc5b-61e5-6690-31095f51186f}">
           <p14:sldIdLst>
             <p14:sldId id="264"/>
           </p14:sldIdLst>
@@ -1166,8 +1166,8 @@
             <a:r>
               <a:rPr lang="en-US" dirty="0"/>
               <a:t>[S07 · 마을을 걸으며 살피고 생활과 이어 말하기]
-목적: 부모와 함께 실제 마을(집·학교 둘레)을 걸으며 환경을 살피고 기록하는지(A), 집에 와서 생활과 이어 말하는지(B) 확인합니다.
-시간: 약 16분(걷기 10분, 이야기 6분)
+목적: 부모와 함께 실제 마을(집·학교 둘레)을 10분쯤 걸으며 환경을 살피고 기록하는지(A), 집에 와서 생활과 이어 말하는지(B) 확인합니다. 걷기 10분, 집에 와서 이야기 6분쯤 잡습니다.
+시간: 약 16분
 이렇게 말해 보세요
 - “오늘은 우리가 마을 탐험가야. 활동지 1의 기록표를 들고 가자.”
 - “여기서 잠깐 멈춰서 눈을 감고 들어 볼까? 무슨 소리가 들려?”

--- a/dist/초2/환경·생태/생활과환경/초2_환경·생태_생활과환경_01_학교와마을의환경.pptx
+++ b/dist/초2/환경·생태/생활과환경/초2_환경·생태_생활과환경_01_학교와마을의환경.pptx
@@ -115,41 +115,41 @@
   <p:extLst>
     <p:ext uri="{521415D9-36F7-43E2-AB2F-B90AF26B5E84}">
       <p14:sectionLst xmlns:p14="http://schemas.microsoft.com/office/powerpoint/2010/main">
-        <p14:section name="도입" id="{d0006111-5f2b-e3d7-87eb-d507edd95787}">
+        <p14:section name="도입" id="{c91786b3-fd51-43ce-156b-85691ccdb760}">
           <p14:sldIdLst>
             <p14:sldId id="256"/>
             <p14:sldId id="257"/>
           </p14:sldIdLst>
         </p14:section>
-        <p14:section name="개념" id="{30d08e42-cfe0-828e-40eb-bbed3f9608b2}">
+        <p14:section name="개념" id="{a48adc1c-905b-50ab-16f6-69398396079f}">
           <p14:sldIdLst>
             <p14:sldId id="258"/>
             <p14:sldId id="260"/>
           </p14:sldIdLst>
         </p14:section>
-        <p14:section name="연습" id="{6df8d4fb-fd0f-6b62-d448-ccde667b208c}">
+        <p14:section name="연습" id="{4f0db032-406f-ec9b-880b-8373133de170}">
           <p14:sldIdLst>
             <p14:sldId id="259"/>
             <p14:sldId id="261"/>
           </p14:sldIdLst>
         </p14:section>
-        <p14:section name="개념" id="{e69c3c26-5cc3-0e03-7e3a-722a14bde1f1}">
+        <p14:section name="개념" id="{fbc2ac66-66b9-15da-953e-2d4386d776f8}">
           <p14:sldIdLst/>
         </p14:section>
-        <p14:section name="연습" id="{debaa79c-4fea-1050-0f38-79a363b3f5ca}">
+        <p14:section name="연습" id="{cb39d6f0-fa0e-8ade-5990-a93f7152b399}">
           <p14:sldIdLst/>
         </p14:section>
-        <p14:section name="확인" id="{42de8374-ac47-cdab-2fd3-edd9f3080f78}">
+        <p14:section name="확인" id="{30df27b7-95e0-8a45-0ab0-a75f02a2b786}">
           <p14:sldIdLst>
             <p14:sldId id="262"/>
           </p14:sldIdLst>
         </p14:section>
-        <p14:section name="정리" id="{4fbf6daa-b5be-721a-e5ca-24df183a680e}">
+        <p14:section name="정리" id="{f8fdf788-6f3e-5717-3aec-7f748f18c371}">
           <p14:sldIdLst>
             <p14:sldId id="263"/>
           </p14:sldIdLst>
         </p14:section>
-        <p14:section name="보충" id="{26a27f17-dc5b-61e5-6690-31095f51186f}">
+        <p14:section name="보충" id="{d4f48b05-d59e-e9b4-3dbb-ccf86ae3d332}">
           <p14:sldIdLst>
             <p14:sldId id="264"/>
           </p14:sldIdLst>
